--- a/BrainSpark_Business_Case.pptx
+++ b/BrainSpark_Business_Case.pptx
@@ -1051,11 +1051,11 @@
         <p:spPr>
           <a:xfrm>
             <a:off x="457200" y="960120"/>
-            <a:ext cx="6812280" cy="2651760"/>
+            <a:ext cx="6812280" cy="2304288"/>
           </a:xfrm>
           <a:prstGeom prst="roundRect">
             <a:avLst>
-              <a:gd name="adj" fmla="val 3103"/>
+              <a:gd name="adj" fmla="val 3571"/>
             </a:avLst>
           </a:prstGeom>
           <a:solidFill>
@@ -1180,8 +1180,8 @@
         </p:nvSpPr>
         <p:spPr>
           <a:xfrm>
-            <a:off x="694944" y="1408176"/>
-            <a:ext cx="6336792" cy="2029968"/>
+            <a:off x="694944" y="1371600"/>
+            <a:ext cx="6336792" cy="1737360"/>
           </a:xfrm>
           <a:prstGeom prst="rect">
             <a:avLst/>
@@ -1198,13 +1198,13 @@
                 <a:spcPct val="93000"/>
               </a:lnSpc>
               <a:spcAft>
-                <a:spcPts val="1000"/>
+                <a:spcPts val="900"/>
               </a:spcAft>
               <a:buSzPct val="100000"/>
               <a:buChar char="•"/>
             </a:pPr>
             <a:r>
-              <a:rPr lang="en-US" sz="1050" dirty="0">
+              <a:rPr lang="en-US" sz="1000" dirty="0">
                 <a:solidFill>
                   <a:srgbClr val="1F2328"/>
                 </a:solidFill>
@@ -1214,7 +1214,7 @@
               </a:rPr>
               <a:t>Cost reduction ideas are usually generated through workshops. Setting these up can take weeks, and the quality of the output depends on which cross-functional team members attend.</a:t>
             </a:r>
-            <a:endParaRPr lang="en-US" sz="1050" dirty="0"/>
+            <a:endParaRPr lang="en-US" sz="1000" dirty="0"/>
           </a:p>
           <a:p>
             <a:pPr marL="342900" indent="-342900">
@@ -1222,13 +1222,13 @@
                 <a:spcPct val="93000"/>
               </a:lnSpc>
               <a:spcAft>
-                <a:spcPts val="1000"/>
+                <a:spcPts val="900"/>
               </a:spcAft>
               <a:buSzPct val="100000"/>
               <a:buChar char="•"/>
             </a:pPr>
             <a:r>
-              <a:rPr lang="en-US" sz="1050" dirty="0">
+              <a:rPr lang="en-US" sz="1000" dirty="0">
                 <a:solidFill>
                   <a:srgbClr val="1F2328"/>
                 </a:solidFill>
@@ -1238,7 +1238,7 @@
               </a:rPr>
               <a:t>Most ideas are captured as a single line, such as "change the material" or "remove the bracket", with little detail on the process, material grade, tolerances or quantities involved.</a:t>
             </a:r>
-            <a:endParaRPr lang="en-US" sz="1050" dirty="0"/>
+            <a:endParaRPr lang="en-US" sz="1000" dirty="0"/>
           </a:p>
           <a:p>
             <a:pPr marL="342900" indent="-342900">
@@ -1246,13 +1246,13 @@
                 <a:spcPct val="93000"/>
               </a:lnSpc>
               <a:spcAft>
-                <a:spcPts val="1000"/>
+                <a:spcPts val="900"/>
               </a:spcAft>
               <a:buSzPct val="100000"/>
               <a:buChar char="•"/>
             </a:pPr>
             <a:r>
-              <a:rPr lang="en-US" sz="1050" dirty="0">
+              <a:rPr lang="en-US" sz="1000" dirty="0">
                 <a:solidFill>
                   <a:srgbClr val="1F2328"/>
                 </a:solidFill>
@@ -1262,7 +1262,7 @@
               </a:rPr>
               <a:t>Nobody knows whether an idea is worth 20p or £2 until someone manually evaluates and costs it.</a:t>
             </a:r>
-            <a:endParaRPr lang="en-US" sz="1050" dirty="0"/>
+            <a:endParaRPr lang="en-US" sz="1000" dirty="0"/>
           </a:p>
           <a:p>
             <a:pPr marL="342900" indent="-342900">
@@ -1270,13 +1270,13 @@
                 <a:spcPct val="93000"/>
               </a:lnSpc>
               <a:spcAft>
-                <a:spcPts val="1000"/>
+                <a:spcPts val="900"/>
               </a:spcAft>
               <a:buSzPct val="100000"/>
               <a:buChar char="•"/>
             </a:pPr>
             <a:r>
-              <a:rPr lang="en-US" sz="1050" dirty="0">
+              <a:rPr lang="en-US" sz="1000" dirty="0">
                 <a:solidFill>
                   <a:srgbClr val="1F2328"/>
                 </a:solidFill>
@@ -1286,7 +1286,7 @@
               </a:rPr>
               <a:t>A programme can contain thousands of parts, but workshops typically review only a small number, so many commodities and opportunities are never explored.</a:t>
             </a:r>
-            <a:endParaRPr lang="en-US" sz="1050" dirty="0"/>
+            <a:endParaRPr lang="en-US" sz="1000" dirty="0"/>
           </a:p>
           <a:p>
             <a:pPr marL="342900" indent="-342900">
@@ -1294,13 +1294,13 @@
                 <a:spcPct val="93000"/>
               </a:lnSpc>
               <a:spcAft>
-                <a:spcPts val="1000"/>
+                <a:spcPts val="900"/>
               </a:spcAft>
               <a:buSzPct val="100000"/>
               <a:buChar char="•"/>
             </a:pPr>
             <a:r>
-              <a:rPr lang="en-US" sz="1050" dirty="0">
+              <a:rPr lang="en-US" sz="1000" dirty="0">
                 <a:solidFill>
                   <a:srgbClr val="1F2328"/>
                 </a:solidFill>
@@ -1310,7 +1310,7 @@
               </a:rPr>
               <a:t>Opportunities often depend on individual expertise. If the right knowledge is not in the room at the time, valuable ideas are overlooked.</a:t>
             </a:r>
-            <a:endParaRPr lang="en-US" sz="1050" dirty="0"/>
+            <a:endParaRPr lang="en-US" sz="1000" dirty="0"/>
           </a:p>
         </p:txBody>
       </p:sp>
@@ -1322,12 +1322,12 @@
         </p:nvSpPr>
         <p:spPr>
           <a:xfrm>
-            <a:off x="457200" y="3721608"/>
-            <a:ext cx="6812280" cy="2907792"/>
+            <a:off x="457200" y="3328416"/>
+            <a:ext cx="6812280" cy="1581912"/>
           </a:xfrm>
           <a:prstGeom prst="roundRect">
             <a:avLst>
-              <a:gd name="adj" fmla="val 2830"/>
+              <a:gd name="adj" fmla="val 5202"/>
             </a:avLst>
           </a:prstGeom>
           <a:solidFill>
@@ -1349,7 +1349,7 @@
         </p:nvSpPr>
         <p:spPr>
           <a:xfrm>
-            <a:off x="694944" y="3840480"/>
+            <a:off x="694944" y="3429000"/>
             <a:ext cx="2743200" cy="219456"/>
           </a:xfrm>
           <a:prstGeom prst="rect">
@@ -1388,8 +1388,8 @@
         </p:nvSpPr>
         <p:spPr>
           <a:xfrm>
-            <a:off x="694944" y="4169664"/>
-            <a:ext cx="6336792" cy="2331720"/>
+            <a:off x="694944" y="3739896"/>
+            <a:ext cx="6336792" cy="1106424"/>
           </a:xfrm>
           <a:prstGeom prst="rect">
             <a:avLst/>
@@ -1406,23 +1406,23 @@
                 <a:spcPct val="93000"/>
               </a:lnSpc>
               <a:spcAft>
-                <a:spcPts val="1000"/>
+                <a:spcPts val="600"/>
               </a:spcAft>
               <a:buSzPct val="100000"/>
               <a:buChar char="•"/>
             </a:pPr>
             <a:r>
-              <a:rPr lang="en-US" sz="1050" dirty="0">
-                <a:solidFill>
-                  <a:srgbClr val="1F2328"/>
-                </a:solidFill>
-                <a:latin typeface="Arial" pitchFamily="34" charset="0"/>
-                <a:ea typeface="Arial" pitchFamily="34" charset="-122"/>
-                <a:cs typeface="Arial" pitchFamily="34" charset="-120"/>
-              </a:rPr>
-              <a:t>Opportunities are identified mainly through workshops, which take time to organise and depend heavily on the knowledge of those who attend.</a:t>
-            </a:r>
-            <a:endParaRPr lang="en-US" sz="1050" dirty="0"/>
+              <a:rPr lang="en-US" sz="1000" dirty="0">
+                <a:solidFill>
+                  <a:srgbClr val="1F2328"/>
+                </a:solidFill>
+                <a:latin typeface="Arial" pitchFamily="34" charset="0"/>
+                <a:ea typeface="Arial" pitchFamily="34" charset="-122"/>
+                <a:cs typeface="Arial" pitchFamily="34" charset="-120"/>
+              </a:rPr>
+              <a:t>Opportunities are identified mainly through workshops, which take time to organise and depend on who attends.</a:t>
+            </a:r>
+            <a:endParaRPr lang="en-US" sz="1000" dirty="0"/>
           </a:p>
           <a:p>
             <a:pPr marL="342900" indent="-342900">
@@ -1430,13 +1430,13 @@
                 <a:spcPct val="93000"/>
               </a:lnSpc>
               <a:spcAft>
-                <a:spcPts val="1000"/>
+                <a:spcPts val="600"/>
               </a:spcAft>
               <a:buSzPct val="100000"/>
               <a:buChar char="•"/>
             </a:pPr>
             <a:r>
-              <a:rPr lang="en-US" sz="1050" dirty="0">
+              <a:rPr lang="en-US" sz="1000" dirty="0">
                 <a:solidFill>
                   <a:srgbClr val="1F2328"/>
                 </a:solidFill>
@@ -1446,7 +1446,7 @@
               </a:rPr>
               <a:t>Ideas are often high level, with limited detail on materials, processes, specifications or technical constraints.</a:t>
             </a:r>
-            <a:endParaRPr lang="en-US" sz="1050" dirty="0"/>
+            <a:endParaRPr lang="en-US" sz="1000" dirty="0"/>
           </a:p>
           <a:p>
             <a:pPr marL="342900" indent="-342900">
@@ -1454,13 +1454,13 @@
                 <a:spcPct val="93000"/>
               </a:lnSpc>
               <a:spcAft>
-                <a:spcPts val="1000"/>
+                <a:spcPts val="600"/>
               </a:spcAft>
               <a:buSzPct val="100000"/>
               <a:buChar char="•"/>
             </a:pPr>
             <a:r>
-              <a:rPr lang="en-US" sz="1050" dirty="0">
+              <a:rPr lang="en-US" sz="1000" dirty="0">
                 <a:solidFill>
                   <a:srgbClr val="1F2328"/>
                 </a:solidFill>
@@ -1470,7 +1470,7 @@
               </a:rPr>
               <a:t>Savings can only be confirmed after manual analysis, costing and data review.</a:t>
             </a:r>
-            <a:endParaRPr lang="en-US" sz="1050" dirty="0"/>
+            <a:endParaRPr lang="en-US" sz="1000" dirty="0"/>
           </a:p>
           <a:p>
             <a:pPr marL="342900" indent="-342900">
@@ -1478,47 +1478,174 @@
                 <a:spcPct val="93000"/>
               </a:lnSpc>
               <a:spcAft>
-                <a:spcPts val="1000"/>
+                <a:spcPts val="600"/>
               </a:spcAft>
               <a:buSzPct val="100000"/>
               <a:buChar char="•"/>
             </a:pPr>
             <a:r>
-              <a:rPr lang="en-US" sz="1050" dirty="0">
-                <a:solidFill>
-                  <a:srgbClr val="1F2328"/>
-                </a:solidFill>
-                <a:latin typeface="Arial" pitchFamily="34" charset="0"/>
-                <a:ea typeface="Arial" pitchFamily="34" charset="-122"/>
-                <a:cs typeface="Arial" pitchFamily="34" charset="-120"/>
-              </a:rPr>
-              <a:t>Technical review, costing and prioritisation are carried out separately, which slows decision making.</a:t>
-            </a:r>
-            <a:endParaRPr lang="en-US" sz="1050" dirty="0"/>
-          </a:p>
+              <a:rPr lang="en-US" sz="1000" dirty="0">
+                <a:solidFill>
+                  <a:srgbClr val="1F2328"/>
+                </a:solidFill>
+                <a:latin typeface="Arial" pitchFamily="34" charset="0"/>
+                <a:ea typeface="Arial" pitchFamily="34" charset="-122"/>
+                <a:cs typeface="Arial" pitchFamily="34" charset="-120"/>
+              </a:rPr>
+              <a:t>Engineers spend significant time collecting and interpreting data, and the process is difficult to scale.</a:t>
+            </a:r>
+            <a:endParaRPr lang="en-US" sz="1000" dirty="0"/>
+          </a:p>
+        </p:txBody>
+      </p:sp>
+      <p:sp>
+        <p:nvSpPr>
+          <p:cNvPr id="12" name="Shape 10"/>
+          <p:cNvSpPr/>
+          <p:nvPr/>
+        </p:nvSpPr>
+        <p:spPr>
+          <a:xfrm>
+            <a:off x="457200" y="5001768"/>
+            <a:ext cx="6812280" cy="1627632"/>
+          </a:xfrm>
+          <a:prstGeom prst="roundRect">
+            <a:avLst>
+              <a:gd name="adj" fmla="val 5056"/>
+            </a:avLst>
+          </a:prstGeom>
+          <a:solidFill>
+            <a:srgbClr val="FBFCFD"/>
+          </a:solidFill>
+          <a:ln w="9525">
+            <a:solidFill>
+              <a:srgbClr val="C9D1D9"/>
+            </a:solidFill>
+            <a:prstDash val="solid"/>
+          </a:ln>
+        </p:spPr>
+      </p:sp>
+      <p:sp>
+        <p:nvSpPr>
+          <p:cNvPr id="13" name="Text 11"/>
+          <p:cNvSpPr txBox="1"/>
+          <p:nvPr/>
+        </p:nvSpPr>
+        <p:spPr>
+          <a:xfrm>
+            <a:off x="694944" y="5102352"/>
+            <a:ext cx="3291840" cy="219456"/>
+          </a:xfrm>
+          <a:prstGeom prst="rect">
+            <a:avLst/>
+          </a:prstGeom>
+          <a:noFill/>
+          <a:ln/>
+        </p:spPr>
+        <p:txBody>
+          <a:bodyPr wrap="square" lIns="0" tIns="0" rIns="0" bIns="0" rtlCol="0" anchor="t"/>
+          <a:lstStyle/>
+          <a:p>
+            <a:pPr indent="0" marL="0">
+              <a:buNone/>
+            </a:pPr>
+            <a:r>
+              <a:rPr lang="en-US" sz="1200" b="1" dirty="0">
+                <a:solidFill>
+                  <a:srgbClr val="1F2328"/>
+                </a:solidFill>
+                <a:latin typeface="Arial" pitchFamily="34" charset="0"/>
+                <a:ea typeface="Arial" pitchFamily="34" charset="-122"/>
+                <a:cs typeface="Arial" pitchFamily="34" charset="-120"/>
+              </a:rPr>
+              <a:t>Proposed Solution / Model</a:t>
+            </a:r>
+            <a:endParaRPr lang="en-US" sz="1200" dirty="0"/>
+          </a:p>
+        </p:txBody>
+      </p:sp>
+      <p:sp>
+        <p:nvSpPr>
+          <p:cNvPr id="14" name="Text 12"/>
+          <p:cNvSpPr txBox="1"/>
+          <p:nvPr/>
+        </p:nvSpPr>
+        <p:spPr>
+          <a:xfrm>
+            <a:off x="5669280" y="5120640"/>
+            <a:ext cx="1371600" cy="201168"/>
+          </a:xfrm>
+          <a:prstGeom prst="rect">
+            <a:avLst/>
+          </a:prstGeom>
+          <a:noFill/>
+          <a:ln/>
+        </p:spPr>
+        <p:txBody>
+          <a:bodyPr wrap="square" lIns="0" tIns="0" rIns="0" bIns="0" rtlCol="0" anchor="t"/>
+          <a:lstStyle/>
+          <a:p>
+            <a:pPr algn="r" indent="0" marL="0">
+              <a:buNone/>
+            </a:pPr>
+            <a:r>
+              <a:rPr lang="en-US" sz="900" i="1" dirty="0">
+                <a:solidFill>
+                  <a:srgbClr val="5B6570"/>
+                </a:solidFill>
+                <a:latin typeface="Arial" pitchFamily="34" charset="0"/>
+                <a:ea typeface="Arial" pitchFamily="34" charset="-122"/>
+                <a:cs typeface="Arial" pitchFamily="34" charset="-120"/>
+              </a:rPr>
+              <a:t>Detail on slide 2</a:t>
+            </a:r>
+            <a:endParaRPr lang="en-US" sz="900" dirty="0"/>
+          </a:p>
+        </p:txBody>
+      </p:sp>
+      <p:sp>
+        <p:nvSpPr>
+          <p:cNvPr id="15" name="Text 13"/>
+          <p:cNvSpPr txBox="1"/>
+          <p:nvPr/>
+        </p:nvSpPr>
+        <p:spPr>
+          <a:xfrm>
+            <a:off x="694944" y="5413248"/>
+            <a:ext cx="6336792" cy="1133856"/>
+          </a:xfrm>
+          <a:prstGeom prst="rect">
+            <a:avLst/>
+          </a:prstGeom>
+          <a:noFill/>
+          <a:ln/>
+        </p:spPr>
+        <p:txBody>
+          <a:bodyPr wrap="square" lIns="0" tIns="0" rIns="0" bIns="0" rtlCol="0" anchor="t"/>
+          <a:lstStyle/>
           <a:p>
             <a:pPr marL="342900" indent="-342900">
               <a:lnSpc>
                 <a:spcPct val="93000"/>
               </a:lnSpc>
               <a:spcAft>
-                <a:spcPts val="1000"/>
+                <a:spcPts val="900"/>
               </a:spcAft>
               <a:buSzPct val="100000"/>
               <a:buChar char="•"/>
             </a:pPr>
             <a:r>
-              <a:rPr lang="en-US" sz="1050" dirty="0">
-                <a:solidFill>
-                  <a:srgbClr val="1F2328"/>
-                </a:solidFill>
-                <a:latin typeface="Arial" pitchFamily="34" charset="0"/>
-                <a:ea typeface="Arial" pitchFamily="34" charset="-122"/>
-                <a:cs typeface="Arial" pitchFamily="34" charset="-120"/>
-              </a:rPr>
-              <a:t>The quality of ideas varies with individual experience, and only a small portion of parts can be reviewed.</a:t>
-            </a:r>
-            <a:endParaRPr lang="en-US" sz="1050" dirty="0"/>
+              <a:rPr lang="en-US" sz="1000" dirty="0">
+                <a:solidFill>
+                  <a:srgbClr val="1F2328"/>
+                </a:solidFill>
+                <a:latin typeface="Arial" pitchFamily="34" charset="0"/>
+                <a:ea typeface="Arial" pitchFamily="34" charset="-122"/>
+                <a:cs typeface="Arial" pitchFamily="34" charset="-120"/>
+              </a:rPr>
+              <a:t>Upload CAD models, drawings, BOMs and cost data into the tool.</a:t>
+            </a:r>
+            <a:endParaRPr lang="en-US" sz="1000" dirty="0"/>
           </a:p>
           <a:p>
             <a:pPr marL="342900" indent="-342900">
@@ -1526,23 +1653,23 @@
                 <a:spcPct val="93000"/>
               </a:lnSpc>
               <a:spcAft>
-                <a:spcPts val="1000"/>
+                <a:spcPts val="900"/>
               </a:spcAft>
               <a:buSzPct val="100000"/>
               <a:buChar char="•"/>
             </a:pPr>
             <a:r>
-              <a:rPr lang="en-US" sz="1050" dirty="0">
-                <a:solidFill>
-                  <a:srgbClr val="1F2328"/>
-                </a:solidFill>
-                <a:latin typeface="Arial" pitchFamily="34" charset="0"/>
-                <a:ea typeface="Arial" pitchFamily="34" charset="-122"/>
-                <a:cs typeface="Arial" pitchFamily="34" charset="-120"/>
-              </a:rPr>
-              <a:t>Engineers spend significant time collecting and interpreting data instead of implementing improvements.</a:t>
-            </a:r>
-            <a:endParaRPr lang="en-US" sz="1050" dirty="0"/>
+              <a:rPr lang="en-US" sz="1000" dirty="0">
+                <a:solidFill>
+                  <a:srgbClr val="1F2328"/>
+                </a:solidFill>
+                <a:latin typeface="Arial" pitchFamily="34" charset="0"/>
+                <a:ea typeface="Arial" pitchFamily="34" charset="-122"/>
+                <a:cs typeface="Arial" pitchFamily="34" charset="-120"/>
+              </a:rPr>
+              <a:t>The design, materials, processes and costs are reviewed automatically, and detailed ideas are generated — each with the change, the saving and the rationale.</a:t>
+            </a:r>
+            <a:endParaRPr lang="en-US" sz="1000" dirty="0"/>
           </a:p>
           <a:p>
             <a:pPr marL="342900" indent="-342900">
@@ -1550,29 +1677,53 @@
                 <a:spcPct val="93000"/>
               </a:lnSpc>
               <a:spcAft>
-                <a:spcPts val="1000"/>
+                <a:spcPts val="900"/>
               </a:spcAft>
               <a:buSzPct val="100000"/>
               <a:buChar char="•"/>
             </a:pPr>
             <a:r>
-              <a:rPr lang="en-US" sz="1050" dirty="0">
-                <a:solidFill>
-                  <a:srgbClr val="1F2328"/>
-                </a:solidFill>
-                <a:latin typeface="Arial" pitchFamily="34" charset="0"/>
-                <a:ea typeface="Arial" pitchFamily="34" charset="-122"/>
-                <a:cs typeface="Arial" pitchFamily="34" charset="-120"/>
-              </a:rPr>
-              <a:t>The process is resource-intensive, time-consuming and difficult to scale across programmes and teams.</a:t>
-            </a:r>
-            <a:endParaRPr lang="en-US" sz="1050" dirty="0"/>
+              <a:rPr lang="en-US" sz="1000" dirty="0">
+                <a:solidFill>
+                  <a:srgbClr val="1F2328"/>
+                </a:solidFill>
+                <a:latin typeface="Arial" pitchFamily="34" charset="0"/>
+                <a:ea typeface="Arial" pitchFamily="34" charset="-122"/>
+                <a:cs typeface="Arial" pitchFamily="34" charset="-120"/>
+              </a:rPr>
+              <a:t>Thousands of parts and assemblies can be assessed, consistently, using the same approach every time.</a:t>
+            </a:r>
+            <a:endParaRPr lang="en-US" sz="1000" dirty="0"/>
+          </a:p>
+          <a:p>
+            <a:pPr marL="342900" indent="-342900">
+              <a:lnSpc>
+                <a:spcPct val="93000"/>
+              </a:lnSpc>
+              <a:spcAft>
+                <a:spcPts val="900"/>
+              </a:spcAft>
+              <a:buSzPct val="100000"/>
+              <a:buChar char="•"/>
+            </a:pPr>
+            <a:r>
+              <a:rPr lang="en-US" sz="1000" dirty="0">
+                <a:solidFill>
+                  <a:srgbClr val="1F2328"/>
+                </a:solidFill>
+                <a:latin typeface="Arial" pitchFamily="34" charset="0"/>
+                <a:ea typeface="Arial" pitchFamily="34" charset="-122"/>
+                <a:cs typeface="Arial" pitchFamily="34" charset="-120"/>
+              </a:rPr>
+              <a:t>Tools built inside BrainSpark: Prism, Innovation Studio, TRIZ Studio and DFM / DFA.</a:t>
+            </a:r>
+            <a:endParaRPr lang="en-US" sz="1000" dirty="0"/>
           </a:p>
         </p:txBody>
       </p:sp>
       <p:sp>
         <p:nvSpPr>
-          <p:cNvPr id="12" name="Shape 10"/>
+          <p:cNvPr id="16" name="Shape 14"/>
           <p:cNvSpPr/>
           <p:nvPr/>
         </p:nvSpPr>
@@ -1599,7 +1750,7 @@
       </p:sp>
       <p:sp>
         <p:nvSpPr>
-          <p:cNvPr id="13" name="Text 11"/>
+          <p:cNvPr id="17" name="Text 15"/>
           <p:cNvSpPr txBox="1"/>
           <p:nvPr/>
         </p:nvSpPr>
@@ -1638,7 +1789,7 @@
       </p:sp>
       <p:sp>
         <p:nvSpPr>
-          <p:cNvPr id="14" name="Text 12"/>
+          <p:cNvPr id="18" name="Text 16"/>
           <p:cNvSpPr txBox="1"/>
           <p:nvPr/>
         </p:nvSpPr>
@@ -1749,7 +1900,7 @@
       </p:sp>
       <p:sp>
         <p:nvSpPr>
-          <p:cNvPr id="15" name="Shape 13"/>
+          <p:cNvPr id="19" name="Shape 17"/>
           <p:cNvSpPr/>
           <p:nvPr/>
         </p:nvSpPr>
@@ -1776,7 +1927,7 @@
       </p:sp>
       <p:sp>
         <p:nvSpPr>
-          <p:cNvPr id="16" name="Text 14"/>
+          <p:cNvPr id="20" name="Text 18"/>
           <p:cNvSpPr txBox="1"/>
           <p:nvPr/>
         </p:nvSpPr>
@@ -1815,7 +1966,7 @@
       </p:sp>
       <p:sp>
         <p:nvSpPr>
-          <p:cNvPr id="17" name="Shape 15"/>
+          <p:cNvPr id="21" name="Shape 19"/>
           <p:cNvSpPr/>
           <p:nvPr/>
         </p:nvSpPr>
@@ -1842,7 +1993,7 @@
       </p:sp>
       <p:sp>
         <p:nvSpPr>
-          <p:cNvPr id="18" name="Text 16"/>
+          <p:cNvPr id="22" name="Text 20"/>
           <p:cNvSpPr txBox="1"/>
           <p:nvPr/>
         </p:nvSpPr>
@@ -1881,7 +2032,7 @@
       </p:sp>
       <p:sp>
         <p:nvSpPr>
-          <p:cNvPr id="19" name="Text 17"/>
+          <p:cNvPr id="23" name="Text 21"/>
           <p:cNvSpPr txBox="1"/>
           <p:nvPr/>
         </p:nvSpPr>
